--- a/proposal/올더베러_BATi_2p.pptx
+++ b/proposal/올더베러_BATi_2p.pptx
@@ -6143,7 +6143,7 @@
             <a:avLst/>
           </a:prstGeom>
           <a:solidFill>
-            <a:srgbClr val="0E5A30"/>
+            <a:srgbClr val="3D2B1B"/>
           </a:solidFill>
           <a:ln>
             <a:noFill/>
@@ -6198,7 +6198,7 @@
             <a:r>
               <a:rPr sz="950" b="1" spc="100">
                 <a:solidFill>
-                  <a:srgbClr val="0E5A30"/>
+                  <a:srgbClr val="3D2B1B"/>
                 </a:solidFill>
                 <a:latin typeface="Pretendard"/>
                 <a:ea typeface="Pretendard"/>
@@ -6344,12 +6344,10 @@
             </a:avLst>
           </a:prstGeom>
           <a:solidFill>
-            <a:srgbClr val="F3F2E7"/>
+            <a:srgbClr val="0E5A30"/>
           </a:solidFill>
-          <a:ln w="12700">
-            <a:solidFill>
-              <a:srgbClr val="C9C4B8"/>
-            </a:solidFill>
+          <a:ln>
+            <a:noFill/>
           </a:ln>
           <a:effectLst/>
         </p:spPr>
@@ -6377,51 +6375,7 @@
       </p:sp>
       <p:sp>
         <p:nvSpPr>
-          <p:cNvPr id="22" name="Rectangle 21"/>
-          <p:cNvSpPr/>
-          <p:nvPr/>
-        </p:nvSpPr>
-        <p:spPr>
-          <a:xfrm>
-            <a:off x="6355080" y="3977639"/>
-            <a:ext cx="109728" cy="1627632"/>
-          </a:xfrm>
-          <a:prstGeom prst="rect">
-            <a:avLst/>
-          </a:prstGeom>
-          <a:solidFill>
-            <a:srgbClr val="3D2B1B"/>
-          </a:solidFill>
-          <a:ln>
-            <a:noFill/>
-          </a:ln>
-          <a:effectLst/>
-        </p:spPr>
-        <p:style>
-          <a:lnRef idx="1">
-            <a:schemeClr val="accent1"/>
-          </a:lnRef>
-          <a:fillRef idx="3">
-            <a:schemeClr val="accent1"/>
-          </a:fillRef>
-          <a:effectRef idx="2">
-            <a:schemeClr val="accent1"/>
-          </a:effectRef>
-          <a:fontRef idx="minor">
-            <a:schemeClr val="lt1"/>
-          </a:fontRef>
-        </p:style>
-        <p:txBody>
-          <a:bodyPr rtlCol="0" anchor="ctr"/>
-          <a:lstStyle/>
-          <a:p>
-            <a:pPr algn="ctr"/>
-          </a:p>
-        </p:txBody>
-      </p:sp>
-      <p:sp>
-        <p:nvSpPr>
-          <p:cNvPr id="23" name="TextBox 22"/>
+          <p:cNvPr id="22" name="TextBox 21"/>
           <p:cNvSpPr txBox="1"/>
           <p:nvPr/>
         </p:nvSpPr>
@@ -6445,19 +6399,19 @@
             <a:r>
               <a:rPr sz="950" b="1" spc="100">
                 <a:solidFill>
-                  <a:srgbClr val="3D2B1B"/>
+                  <a:srgbClr val="C7CE3E"/>
                 </a:solidFill>
                 <a:latin typeface="Pretendard"/>
                 <a:ea typeface="Pretendard"/>
               </a:rPr>
-              <a:t>04  GOVERNANCE</a:t>
-            </a:r>
-          </a:p>
-        </p:txBody>
-      </p:sp>
-      <p:sp>
-        <p:nvSpPr>
-          <p:cNvPr id="24" name="TextBox 23"/>
+              <a:t>04  COST ADVANTAGE</a:t>
+            </a:r>
+          </a:p>
+        </p:txBody>
+      </p:sp>
+      <p:sp>
+        <p:nvSpPr>
+          <p:cNvPr id="23" name="TextBox 22"/>
           <p:cNvSpPr txBox="1"/>
           <p:nvPr/>
         </p:nvSpPr>
@@ -6481,19 +6435,19 @@
             <a:r>
               <a:rPr sz="1450" b="1" spc="-100">
                 <a:solidFill>
-                  <a:srgbClr val="141412"/>
+                  <a:srgbClr val="FFFFFF"/>
                 </a:solidFill>
                 <a:latin typeface="Pretendard"/>
                 <a:ea typeface="Pretendard"/>
               </a:rPr>
-              <a:t>양해각서(MOU) 운영</a:t>
-            </a:r>
-          </a:p>
-        </p:txBody>
-      </p:sp>
-      <p:sp>
-        <p:nvSpPr>
-          <p:cNvPr id="25" name="TextBox 24"/>
+              <a:t>비용 경쟁력</a:t>
+            </a:r>
+          </a:p>
+        </p:txBody>
+      </p:sp>
+      <p:sp>
+        <p:nvSpPr>
+          <p:cNvPr id="24" name="TextBox 23"/>
           <p:cNvSpPr txBox="1"/>
           <p:nvPr/>
         </p:nvSpPr>
@@ -6524,12 +6478,12 @@
             <a:r>
               <a:rPr sz="1050" b="0" spc="-100">
                 <a:solidFill>
-                  <a:srgbClr val="3A3A36"/>
+                  <a:srgbClr val="E8F1E8"/>
                 </a:solidFill>
                 <a:latin typeface="Pretendard"/>
                 <a:ea typeface="Pretendard"/>
               </a:rPr>
-              <a:t>·  법적 부담 없는 느슨한 합의 · 단일 커뮤니케이션 창구</a:t>
+              <a:t>·  고성과 크리에이터, 시장 통상 건당 50만원 이상</a:t>
             </a:r>
           </a:p>
           <a:p>
@@ -6544,12 +6498,12 @@
             <a:r>
               <a:rPr sz="1050" b="0" spc="-100">
                 <a:solidFill>
-                  <a:srgbClr val="3A3A36"/>
+                  <a:srgbClr val="E8F1E8"/>
                 </a:solidFill>
                 <a:latin typeface="Pretendard"/>
                 <a:ea typeface="Pretendard"/>
               </a:rPr>
-              <a:t>·  브랜드 가이드·일정은 반드시 준수</a:t>
+              <a:t>·  구좌 선점 + 다회차 계약으로 건당 40만원 확보 (20% ↓)</a:t>
             </a:r>
           </a:p>
           <a:p>
@@ -6564,19 +6518,19 @@
             <a:r>
               <a:rPr sz="1050" b="0" spc="-100">
                 <a:solidFill>
-                  <a:srgbClr val="3A3A36"/>
+                  <a:srgbClr val="E8F1E8"/>
                 </a:solidFill>
                 <a:latin typeface="Pretendard"/>
                 <a:ea typeface="Pretendard"/>
               </a:rPr>
-              <a:t>·  경쟁 카테고리 충돌 통제(원칙 MOU 명시)</a:t>
-            </a:r>
-          </a:p>
-        </p:txBody>
-      </p:sp>
-      <p:sp>
-        <p:nvSpPr>
-          <p:cNvPr id="26" name="Rounded Rectangle 25"/>
+              <a:t>·  예측 가능한 단가로 안정적 고품질 콘텐츠 수급</a:t>
+            </a:r>
+          </a:p>
+        </p:txBody>
+      </p:sp>
+      <p:sp>
+        <p:nvSpPr>
+          <p:cNvPr id="25" name="Rounded Rectangle 24"/>
           <p:cNvSpPr/>
           <p:nvPr/>
         </p:nvSpPr>
@@ -6622,7 +6576,7 @@
       </p:sp>
       <p:sp>
         <p:nvSpPr>
-          <p:cNvPr id="27" name="TextBox 26"/>
+          <p:cNvPr id="26" name="TextBox 25"/>
           <p:cNvSpPr txBox="1"/>
           <p:nvPr/>
         </p:nvSpPr>
@@ -6644,14 +6598,14 @@
           <a:p>
             <a:pPr algn="ctr"/>
             <a:r>
-              <a:rPr sz="1150" b="1" spc="-100">
-                <a:solidFill>
-                  <a:srgbClr val="FFFFFF"/>
+              <a:rPr sz="1100" b="1" spc="-100">
+                <a:solidFill>
+                  <a:srgbClr val="C7CE3E"/>
                 </a:solidFill>
                 <a:latin typeface="Pretendard"/>
                 <a:ea typeface="Pretendard"/>
               </a:rPr>
-              <a:t>우리는 크리에이터를 ‘채널’로 소비하지 않습니다  —  </a:t>
+              <a:t>광고주 베네핏     </a:t>
             </a:r>
           </a:p>
           <a:p>
@@ -6659,12 +6613,12 @@
             <a:r>
               <a:rPr sz="1150" b="1" spc="-100">
                 <a:solidFill>
-                  <a:srgbClr val="C7CE3E"/>
+                  <a:srgbClr val="FFFFFF"/>
                 </a:solidFill>
                 <a:latin typeface="Pretendard"/>
                 <a:ea typeface="Pretendard"/>
               </a:rPr>
-              <a:t>브랜드와 함께 성장하는 ‘관계와 시스템’을 구축합니다</a:t>
+              <a:t>시장가 대비 약 20% 절감 단가   ·   검증된 고품질 콘텐츠   ·   6개월 안정적·예측 가능한 수급</a:t>
             </a:r>
           </a:p>
         </p:txBody>
